--- a/UmaTeachingMaterial/JavaScript/JavaScript-Interview-QA-Intellipaat.pptx
+++ b/UmaTeachingMaterial/JavaScript/JavaScript-Interview-QA-Intellipaat.pptx
@@ -346,7 +346,7 @@
           <a:p>
             <a:fld id="{2D1FB5FC-1629-4A0D-9573-785FAC7ED015}" type="datetimeFigureOut">
               <a:rPr lang="en-US" smtClean="0"/>
-              <a:t>2/22/2026</a:t>
+              <a:t>3/6/2026</a:t>
             </a:fld>
             <a:endParaRPr lang="en-US"/>
           </a:p>
@@ -516,7 +516,7 @@
           <a:p>
             <a:fld id="{2D1FB5FC-1629-4A0D-9573-785FAC7ED015}" type="datetimeFigureOut">
               <a:rPr lang="en-US" smtClean="0"/>
-              <a:t>2/22/2026</a:t>
+              <a:t>3/6/2026</a:t>
             </a:fld>
             <a:endParaRPr lang="en-US"/>
           </a:p>
@@ -696,7 +696,7 @@
           <a:p>
             <a:fld id="{2D1FB5FC-1629-4A0D-9573-785FAC7ED015}" type="datetimeFigureOut">
               <a:rPr lang="en-US" smtClean="0"/>
-              <a:t>2/22/2026</a:t>
+              <a:t>3/6/2026</a:t>
             </a:fld>
             <a:endParaRPr lang="en-US"/>
           </a:p>
@@ -866,7 +866,7 @@
           <a:p>
             <a:fld id="{2D1FB5FC-1629-4A0D-9573-785FAC7ED015}" type="datetimeFigureOut">
               <a:rPr lang="en-US" smtClean="0"/>
-              <a:t>2/22/2026</a:t>
+              <a:t>3/6/2026</a:t>
             </a:fld>
             <a:endParaRPr lang="en-US"/>
           </a:p>
@@ -1112,7 +1112,7 @@
           <a:p>
             <a:fld id="{2D1FB5FC-1629-4A0D-9573-785FAC7ED015}" type="datetimeFigureOut">
               <a:rPr lang="en-US" smtClean="0"/>
-              <a:t>2/22/2026</a:t>
+              <a:t>3/6/2026</a:t>
             </a:fld>
             <a:endParaRPr lang="en-US"/>
           </a:p>
@@ -1344,7 +1344,7 @@
           <a:p>
             <a:fld id="{2D1FB5FC-1629-4A0D-9573-785FAC7ED015}" type="datetimeFigureOut">
               <a:rPr lang="en-US" smtClean="0"/>
-              <a:t>2/22/2026</a:t>
+              <a:t>3/6/2026</a:t>
             </a:fld>
             <a:endParaRPr lang="en-US"/>
           </a:p>
@@ -1711,7 +1711,7 @@
           <a:p>
             <a:fld id="{2D1FB5FC-1629-4A0D-9573-785FAC7ED015}" type="datetimeFigureOut">
               <a:rPr lang="en-US" smtClean="0"/>
-              <a:t>2/22/2026</a:t>
+              <a:t>3/6/2026</a:t>
             </a:fld>
             <a:endParaRPr lang="en-US"/>
           </a:p>
@@ -1829,7 +1829,7 @@
           <a:p>
             <a:fld id="{2D1FB5FC-1629-4A0D-9573-785FAC7ED015}" type="datetimeFigureOut">
               <a:rPr lang="en-US" smtClean="0"/>
-              <a:t>2/22/2026</a:t>
+              <a:t>3/6/2026</a:t>
             </a:fld>
             <a:endParaRPr lang="en-US"/>
           </a:p>
@@ -1924,7 +1924,7 @@
           <a:p>
             <a:fld id="{2D1FB5FC-1629-4A0D-9573-785FAC7ED015}" type="datetimeFigureOut">
               <a:rPr lang="en-US" smtClean="0"/>
-              <a:t>2/22/2026</a:t>
+              <a:t>3/6/2026</a:t>
             </a:fld>
             <a:endParaRPr lang="en-US"/>
           </a:p>
@@ -2201,7 +2201,7 @@
           <a:p>
             <a:fld id="{2D1FB5FC-1629-4A0D-9573-785FAC7ED015}" type="datetimeFigureOut">
               <a:rPr lang="en-US" smtClean="0"/>
-              <a:t>2/22/2026</a:t>
+              <a:t>3/6/2026</a:t>
             </a:fld>
             <a:endParaRPr lang="en-US"/>
           </a:p>
@@ -2458,7 +2458,7 @@
           <a:p>
             <a:fld id="{2D1FB5FC-1629-4A0D-9573-785FAC7ED015}" type="datetimeFigureOut">
               <a:rPr lang="en-US" smtClean="0"/>
-              <a:t>2/22/2026</a:t>
+              <a:t>3/6/2026</a:t>
             </a:fld>
             <a:endParaRPr lang="en-US"/>
           </a:p>
@@ -2671,7 +2671,7 @@
           <a:p>
             <a:fld id="{2D1FB5FC-1629-4A0D-9573-785FAC7ED015}" type="datetimeFigureOut">
               <a:rPr lang="en-US" smtClean="0"/>
-              <a:t>2/22/2026</a:t>
+              <a:t>3/6/2026</a:t>
             </a:fld>
             <a:endParaRPr lang="en-US"/>
           </a:p>
@@ -3091,12 +3091,20 @@
         <p:spPr>
           <a:xfrm>
             <a:off x="94397" y="74235"/>
-            <a:ext cx="9717206" cy="6709529"/>
+            <a:ext cx="9717206" cy="4054956"/>
           </a:xfrm>
           <a:prstGeom prst="rect">
             <a:avLst/>
           </a:prstGeom>
           <a:noFill/>
+          <a:ln>
+            <a:solidFill>
+              <a:schemeClr val="tx1">
+                <a:lumMod val="50000"/>
+                <a:lumOff val="50000"/>
+              </a:schemeClr>
+            </a:solidFill>
+          </a:ln>
         </p:spPr>
         <p:txBody>
           <a:bodyPr wrap="square">
@@ -3255,17 +3263,15 @@
               </a:rPr>
               <a:t>&gt;</a:t>
             </a:r>
-          </a:p>
-          <a:p>
-            <a:pPr algn="l">
-              <a:spcBef>
-                <a:spcPts val="1125"/>
-              </a:spcBef>
-              <a:spcAft>
-                <a:spcPts val="375"/>
-              </a:spcAft>
-              <a:buNone/>
-            </a:pPr>
+            <a:br>
+              <a:rPr lang="en-US" b="0" i="0" dirty="0">
+                <a:solidFill>
+                  <a:srgbClr val="212529"/>
+                </a:solidFill>
+                <a:effectLst/>
+                <a:latin typeface="Courier New" panose="02070309020205020404" pitchFamily="49" charset="0"/>
+              </a:rPr>
+            </a:br>
             <a:r>
               <a:rPr lang="en-US" b="0" i="0" dirty="0">
                 <a:solidFill>
@@ -3296,17 +3302,15 @@
               </a:rPr>
               <a:t>&gt;</a:t>
             </a:r>
-          </a:p>
-          <a:p>
-            <a:pPr algn="l">
-              <a:spcBef>
-                <a:spcPts val="1125"/>
-              </a:spcBef>
-              <a:spcAft>
-                <a:spcPts val="375"/>
-              </a:spcAft>
-              <a:buNone/>
-            </a:pPr>
+            <a:br>
+              <a:rPr lang="en-US" b="0" i="0" dirty="0">
+                <a:solidFill>
+                  <a:srgbClr val="212529"/>
+                </a:solidFill>
+                <a:effectLst/>
+                <a:latin typeface="Courier New" panose="02070309020205020404" pitchFamily="49" charset="0"/>
+              </a:rPr>
+            </a:br>
             <a:r>
               <a:rPr lang="en-US" b="0" i="0" dirty="0">
                 <a:solidFill>
@@ -3317,17 +3321,15 @@
               </a:rPr>
               <a:t>Here ‘x’ has data type of Number</a:t>
             </a:r>
-          </a:p>
-          <a:p>
-            <a:pPr algn="l">
-              <a:spcBef>
-                <a:spcPts val="1125"/>
-              </a:spcBef>
-              <a:spcAft>
-                <a:spcPts val="375"/>
-              </a:spcAft>
-              <a:buNone/>
-            </a:pPr>
+            <a:br>
+              <a:rPr lang="en-US" b="0" i="0" dirty="0">
+                <a:solidFill>
+                  <a:srgbClr val="212529"/>
+                </a:solidFill>
+                <a:effectLst/>
+                <a:latin typeface="Courier New" panose="02070309020205020404" pitchFamily="49" charset="0"/>
+              </a:rPr>
+            </a:br>
             <a:r>
               <a:rPr lang="en-US" b="0" i="0" dirty="0">
                 <a:solidFill>
@@ -3378,17 +3380,15 @@
               </a:rPr>
               <a:t>&gt;</a:t>
             </a:r>
-          </a:p>
-          <a:p>
-            <a:pPr algn="l">
-              <a:spcBef>
-                <a:spcPts val="1125"/>
-              </a:spcBef>
-              <a:spcAft>
-                <a:spcPts val="375"/>
-              </a:spcAft>
-              <a:buNone/>
-            </a:pPr>
+            <a:br>
+              <a:rPr lang="en-US" b="0" i="0" dirty="0">
+                <a:solidFill>
+                  <a:srgbClr val="212529"/>
+                </a:solidFill>
+                <a:effectLst/>
+                <a:latin typeface="Courier New" panose="02070309020205020404" pitchFamily="49" charset="0"/>
+              </a:rPr>
+            </a:br>
             <a:r>
               <a:rPr lang="en-US" b="0" i="0" dirty="0">
                 <a:solidFill>
@@ -3420,8 +3420,45 @@
               <a:t>&gt;</a:t>
             </a:r>
           </a:p>
-          <a:p>
-            <a:pPr algn="l">
+        </p:txBody>
+      </p:sp>
+      <p:sp>
+        <p:nvSpPr>
+          <p:cNvPr id="4" name="TextBox 3">
+            <a:extLst>
+              <a:ext uri="{FF2B5EF4-FFF2-40B4-BE49-F238E27FC236}">
+                <a16:creationId xmlns:a16="http://schemas.microsoft.com/office/drawing/2014/main" id="{1E2F056A-16E9-E357-D189-F4E18D95D2FB}"/>
+              </a:ext>
+            </a:extLst>
+          </p:cNvPr>
+          <p:cNvSpPr txBox="1"/>
+          <p:nvPr/>
+        </p:nvSpPr>
+        <p:spPr>
+          <a:xfrm>
+            <a:off x="94397" y="4405133"/>
+            <a:ext cx="9559557" cy="1618392"/>
+          </a:xfrm>
+          <a:prstGeom prst="rect">
+            <a:avLst/>
+          </a:prstGeom>
+          <a:noFill/>
+          <a:ln>
+            <a:solidFill>
+              <a:schemeClr val="tx1">
+                <a:lumMod val="50000"/>
+                <a:lumOff val="50000"/>
+              </a:schemeClr>
+            </a:solidFill>
+          </a:ln>
+        </p:spPr>
+        <p:txBody>
+          <a:bodyPr wrap="square">
+            <a:spAutoFit/>
+          </a:bodyPr>
+          <a:lstStyle/>
+          <a:p>
+            <a:pPr marL="0" marR="0" lvl="0" indent="0" algn="l" defTabSz="457200" rtl="0" eaLnBrk="1" fontAlgn="auto" latinLnBrk="0" hangingPunct="1">
               <a:lnSpc>
                 <a:spcPts val="2100"/>
               </a:lnSpc>
@@ -3431,56 +3468,97 @@
               <a:spcAft>
                 <a:spcPts val="1800"/>
               </a:spcAft>
-              <a:buNone/>
-            </a:pPr>
-            <a:r>
-              <a:rPr lang="en-US" b="0" i="0" dirty="0">
+              <a:buClrTx/>
+              <a:buSzTx/>
+              <a:buFontTx/>
+              <a:buNone/>
+              <a:tabLst/>
+              <a:defRPr/>
+            </a:pPr>
+            <a:r>
+              <a:rPr kumimoji="0" lang="en-US" sz="1800" b="0" i="0" u="none" strike="noStrike" kern="1200" cap="none" spc="0" normalizeH="0" baseline="0" noProof="0" dirty="0">
+                <a:ln>
+                  <a:noFill/>
+                </a:ln>
                 <a:solidFill>
                   <a:srgbClr val="272C37"/>
                 </a:solidFill>
                 <a:effectLst/>
-                <a:latin typeface="Roboto" panose="02000000000000000000" pitchFamily="2" charset="0"/>
+                <a:uLnTx/>
+                <a:uFillTx/>
+                <a:latin typeface="Roboto" panose="02000000000000000000" pitchFamily="2" charset="0"/>
+                <a:ea typeface="+mn-ea"/>
+                <a:cs typeface="+mn-cs"/>
               </a:rPr>
               <a:t>2. Is JavaScript synchronous or asynchronous?</a:t>
             </a:r>
           </a:p>
           <a:p>
-            <a:pPr algn="just">
+            <a:pPr marL="0" marR="0" lvl="0" indent="0" algn="just" defTabSz="457200" rtl="0" eaLnBrk="1" fontAlgn="auto" latinLnBrk="0" hangingPunct="1">
               <a:lnSpc>
                 <a:spcPts val="2100"/>
               </a:lnSpc>
               <a:spcBef>
                 <a:spcPts val="1650"/>
               </a:spcBef>
-              <a:buNone/>
-            </a:pPr>
-            <a:r>
-              <a:rPr lang="en-US" b="0" i="0" dirty="0">
-                <a:solidFill>
-                  <a:srgbClr val="3A3A3A"/>
-                </a:solidFill>
-                <a:effectLst/>
-                <a:latin typeface="Roboto" panose="02000000000000000000" pitchFamily="2" charset="0"/>
+              <a:spcAft>
+                <a:spcPts val="0"/>
+              </a:spcAft>
+              <a:buClrTx/>
+              <a:buSzTx/>
+              <a:buFontTx/>
+              <a:buNone/>
+              <a:tabLst/>
+              <a:defRPr/>
+            </a:pPr>
+            <a:r>
+              <a:rPr kumimoji="0" lang="en-US" sz="1800" b="0" i="0" u="none" strike="noStrike" kern="1200" cap="none" spc="0" normalizeH="0" baseline="0" noProof="0" dirty="0">
+                <a:ln>
+                  <a:noFill/>
+                </a:ln>
+                <a:solidFill>
+                  <a:srgbClr val="3A3A3A"/>
+                </a:solidFill>
+                <a:effectLst/>
+                <a:uLnTx/>
+                <a:uFillTx/>
+                <a:latin typeface="Roboto" panose="02000000000000000000" pitchFamily="2" charset="0"/>
+                <a:ea typeface="+mn-ea"/>
+                <a:cs typeface="+mn-cs"/>
               </a:rPr>
               <a:t>JavaScript is synchronous and single-threaded by default. It becomes asynchronous when using asynchronous operations like making HTTP requests, using timers, </a:t>
             </a:r>
             <a:r>
-              <a:rPr lang="en-US" b="0" i="0" dirty="0" err="1">
-                <a:solidFill>
-                  <a:srgbClr val="3A3A3A"/>
-                </a:solidFill>
-                <a:effectLst/>
-                <a:latin typeface="Roboto" panose="02000000000000000000" pitchFamily="2" charset="0"/>
+              <a:rPr kumimoji="0" lang="en-US" sz="1800" b="0" i="0" u="none" strike="noStrike" kern="1200" cap="none" spc="0" normalizeH="0" baseline="0" noProof="0" dirty="0" err="1">
+                <a:ln>
+                  <a:noFill/>
+                </a:ln>
+                <a:solidFill>
+                  <a:srgbClr val="3A3A3A"/>
+                </a:solidFill>
+                <a:effectLst/>
+                <a:uLnTx/>
+                <a:uFillTx/>
+                <a:latin typeface="Roboto" panose="02000000000000000000" pitchFamily="2" charset="0"/>
+                <a:ea typeface="+mn-ea"/>
+                <a:cs typeface="+mn-cs"/>
               </a:rPr>
               <a:t>etc</a:t>
             </a:r>
             <a:r>
-              <a:rPr lang="en-US" b="0" i="0" dirty="0">
-                <a:solidFill>
-                  <a:srgbClr val="3A3A3A"/>
-                </a:solidFill>
-                <a:effectLst/>
-                <a:latin typeface="Roboto" panose="02000000000000000000" pitchFamily="2" charset="0"/>
+              <a:rPr kumimoji="0" lang="en-US" sz="1800" b="0" i="0" u="none" strike="noStrike" kern="1200" cap="none" spc="0" normalizeH="0" baseline="0" noProof="0" dirty="0">
+                <a:ln>
+                  <a:noFill/>
+                </a:ln>
+                <a:solidFill>
+                  <a:srgbClr val="3A3A3A"/>
+                </a:solidFill>
+                <a:effectLst/>
+                <a:uLnTx/>
+                <a:uFillTx/>
+                <a:latin typeface="Roboto" panose="02000000000000000000" pitchFamily="2" charset="0"/>
+                <a:ea typeface="+mn-ea"/>
+                <a:cs typeface="+mn-cs"/>
               </a:rPr>
               <a:t>, or using web workers.</a:t>
             </a:r>
@@ -7593,8 +7671,8 @@
         </p:nvSpPr>
         <p:spPr>
           <a:xfrm>
-            <a:off x="-197892" y="-547238"/>
-            <a:ext cx="4954136" cy="7522572"/>
+            <a:off x="256769" y="131312"/>
+            <a:ext cx="9649231" cy="3077766"/>
           </a:xfrm>
           <a:prstGeom prst="rect">
             <a:avLst/>
@@ -7608,19 +7686,13 @@
           <a:lstStyle/>
           <a:p>
             <a:pPr algn="l">
-              <a:lnSpc>
-                <a:spcPts val="2100"/>
-              </a:lnSpc>
-              <a:spcBef>
-                <a:spcPts val="2400"/>
-              </a:spcBef>
               <a:spcAft>
                 <a:spcPts val="1800"/>
               </a:spcAft>
               <a:buNone/>
             </a:pPr>
             <a:r>
-              <a:rPr lang="en-US" b="0" i="0" dirty="0">
+              <a:rPr lang="en-US" sz="1200" b="0" i="0" dirty="0">
                 <a:solidFill>
                   <a:srgbClr val="272C37"/>
                 </a:solidFill>
@@ -7632,16 +7704,10 @@
           </a:p>
           <a:p>
             <a:pPr algn="just">
-              <a:lnSpc>
-                <a:spcPts val="2100"/>
-              </a:lnSpc>
-              <a:spcBef>
-                <a:spcPts val="1650"/>
-              </a:spcBef>
-              <a:buNone/>
-            </a:pPr>
-            <a:r>
-              <a:rPr lang="en-US" b="0" i="0" dirty="0">
+              <a:buNone/>
+            </a:pPr>
+            <a:r>
+              <a:rPr lang="en-US" sz="1200" b="0" i="0" dirty="0">
                 <a:solidFill>
                   <a:srgbClr val="3A3A3A"/>
                 </a:solidFill>
@@ -7651,7 +7717,7 @@
               <a:t>JavaScript has the following </a:t>
             </a:r>
             <a:r>
-              <a:rPr lang="en-US" b="0" i="0" u="none" strike="noStrike" dirty="0">
+              <a:rPr lang="en-US" sz="1200" b="0" i="0" u="none" strike="noStrike" dirty="0">
                 <a:solidFill>
                   <a:srgbClr val="0F5A9E"/>
                 </a:solidFill>
@@ -7662,7 +7728,7 @@
               <a:t>data types</a:t>
             </a:r>
             <a:r>
-              <a:rPr lang="en-US" b="0" i="0" dirty="0">
+              <a:rPr lang="en-US" sz="1200" b="0" i="0" dirty="0">
                 <a:solidFill>
                   <a:srgbClr val="3A3A3A"/>
                 </a:solidFill>
@@ -7674,12 +7740,6 @@
           </a:p>
           <a:p>
             <a:pPr algn="just">
-              <a:lnSpc>
-                <a:spcPts val="2100"/>
-              </a:lnSpc>
-              <a:spcBef>
-                <a:spcPts val="750"/>
-              </a:spcBef>
               <a:spcAft>
                 <a:spcPts val="600"/>
               </a:spcAft>
@@ -7687,7 +7747,7 @@
               <a:buAutoNum type="arabicPeriod"/>
             </a:pPr>
             <a:r>
-              <a:rPr lang="en-US" b="0" i="0" dirty="0">
+              <a:rPr lang="en-US" sz="1200" b="0" i="0" dirty="0">
                 <a:solidFill>
                   <a:srgbClr val="3A3A3A"/>
                 </a:solidFill>
@@ -7699,16 +7759,13 @@
           </a:p>
           <a:p>
             <a:pPr algn="l">
-              <a:spcBef>
-                <a:spcPts val="1125"/>
-              </a:spcBef>
-              <a:spcAft>
-                <a:spcPts val="375"/>
-              </a:spcAft>
-              <a:buNone/>
-            </a:pPr>
-            <a:r>
-              <a:rPr lang="en-US" b="0" i="0" dirty="0">
+              <a:spcAft>
+                <a:spcPts val="375"/>
+              </a:spcAft>
+              <a:buNone/>
+            </a:pPr>
+            <a:r>
+              <a:rPr lang="en-US" sz="1200" b="0" i="0" dirty="0">
                 <a:solidFill>
                   <a:srgbClr val="212529"/>
                 </a:solidFill>
@@ -7718,7 +7775,7 @@
               <a:t>&lt;</a:t>
             </a:r>
             <a:r>
-              <a:rPr lang="en-US" b="0" i="0" dirty="0" err="1">
+              <a:rPr lang="en-US" sz="1200" b="0" i="0" dirty="0" err="1">
                 <a:solidFill>
                   <a:srgbClr val="212529"/>
                 </a:solidFill>
@@ -7728,7 +7785,7 @@
               <a:t>br</a:t>
             </a:r>
             <a:r>
-              <a:rPr lang="en-US" b="0" i="0" dirty="0">
+              <a:rPr lang="en-US" sz="1200" b="0" i="0" dirty="0">
                 <a:solidFill>
                   <a:srgbClr val="212529"/>
                 </a:solidFill>
@@ -7740,16 +7797,13 @@
           </a:p>
           <a:p>
             <a:pPr algn="l">
-              <a:spcBef>
-                <a:spcPts val="1125"/>
-              </a:spcBef>
-              <a:spcAft>
-                <a:spcPts val="375"/>
-              </a:spcAft>
-              <a:buNone/>
-            </a:pPr>
-            <a:r>
-              <a:rPr lang="en-US" b="0" i="0" dirty="0">
+              <a:spcAft>
+                <a:spcPts val="375"/>
+              </a:spcAft>
+              <a:buNone/>
+            </a:pPr>
+            <a:r>
+              <a:rPr lang="en-US" sz="1200" b="0" i="0" dirty="0">
                 <a:solidFill>
                   <a:srgbClr val="212529"/>
                 </a:solidFill>
@@ -7759,7 +7813,7 @@
               <a:t>let sum = 555;&lt;</a:t>
             </a:r>
             <a:r>
-              <a:rPr lang="en-US" b="0" i="0" dirty="0" err="1">
+              <a:rPr lang="en-US" sz="1200" b="0" i="0" dirty="0" err="1">
                 <a:solidFill>
                   <a:srgbClr val="212529"/>
                 </a:solidFill>
@@ -7769,7 +7823,7 @@
               <a:t>br</a:t>
             </a:r>
             <a:r>
-              <a:rPr lang="en-US" b="0" i="0" dirty="0">
+              <a:rPr lang="en-US" sz="1200" b="0" i="0" dirty="0">
                 <a:solidFill>
                   <a:srgbClr val="212529"/>
                 </a:solidFill>
@@ -7781,16 +7835,13 @@
           </a:p>
           <a:p>
             <a:pPr algn="l">
-              <a:spcBef>
-                <a:spcPts val="1125"/>
-              </a:spcBef>
-              <a:spcAft>
-                <a:spcPts val="375"/>
-              </a:spcAft>
-              <a:buNone/>
-            </a:pPr>
-            <a:r>
-              <a:rPr lang="en-US" b="0" i="0" dirty="0">
+              <a:spcAft>
+                <a:spcPts val="375"/>
+              </a:spcAft>
+              <a:buNone/>
+            </a:pPr>
+            <a:r>
+              <a:rPr lang="en-US" sz="1200" b="0" i="0" dirty="0">
                 <a:solidFill>
                   <a:srgbClr val="212529"/>
                 </a:solidFill>
@@ -7800,7 +7851,7 @@
               <a:t>let share = 55.55;&lt;</a:t>
             </a:r>
             <a:r>
-              <a:rPr lang="en-US" b="0" i="0" dirty="0" err="1">
+              <a:rPr lang="en-US" sz="1200" b="0" i="0" dirty="0" err="1">
                 <a:solidFill>
                   <a:srgbClr val="212529"/>
                 </a:solidFill>
@@ -7810,7 +7861,7 @@
               <a:t>br</a:t>
             </a:r>
             <a:r>
-              <a:rPr lang="en-US" b="0" i="0" dirty="0">
+              <a:rPr lang="en-US" sz="1200" b="0" i="0" dirty="0">
                 <a:solidFill>
                   <a:srgbClr val="212529"/>
                 </a:solidFill>
@@ -7822,12 +7873,6 @@
           </a:p>
           <a:p>
             <a:pPr algn="just">
-              <a:lnSpc>
-                <a:spcPts val="2100"/>
-              </a:lnSpc>
-              <a:spcBef>
-                <a:spcPts val="1650"/>
-              </a:spcBef>
               <a:spcAft>
                 <a:spcPts val="600"/>
               </a:spcAft>
@@ -7835,7 +7880,7 @@
               <a:buAutoNum type="arabicPeriod" startAt="2"/>
             </a:pPr>
             <a:r>
-              <a:rPr lang="en-US" b="0" i="0" dirty="0" err="1">
+              <a:rPr lang="en-US" sz="1200" b="0" i="0" dirty="0" err="1">
                 <a:solidFill>
                   <a:srgbClr val="3A3A3A"/>
                 </a:solidFill>
@@ -7845,7 +7890,7 @@
               <a:t>BigInt</a:t>
             </a:r>
             <a:r>
-              <a:rPr lang="en-US" b="0" i="0" dirty="0">
+              <a:rPr lang="en-US" sz="1200" b="0" i="0" dirty="0">
                 <a:solidFill>
                   <a:srgbClr val="3A3A3A"/>
                 </a:solidFill>
@@ -7857,16 +7902,13 @@
           </a:p>
           <a:p>
             <a:pPr algn="l">
-              <a:spcBef>
-                <a:spcPts val="1125"/>
-              </a:spcBef>
-              <a:spcAft>
-                <a:spcPts val="375"/>
-              </a:spcAft>
-              <a:buNone/>
-            </a:pPr>
-            <a:r>
-              <a:rPr lang="en-US" b="0" i="0" dirty="0">
+              <a:spcAft>
+                <a:spcPts val="375"/>
+              </a:spcAft>
+              <a:buNone/>
+            </a:pPr>
+            <a:r>
+              <a:rPr lang="en-US" sz="1200" b="0" i="0" dirty="0">
                 <a:solidFill>
                   <a:srgbClr val="212529"/>
                 </a:solidFill>
@@ -7876,7 +7918,7 @@
               <a:t>&lt;</a:t>
             </a:r>
             <a:r>
-              <a:rPr lang="en-US" b="0" i="0" dirty="0" err="1">
+              <a:rPr lang="en-US" sz="1200" b="0" i="0" dirty="0" err="1">
                 <a:solidFill>
                   <a:srgbClr val="212529"/>
                 </a:solidFill>
@@ -7886,7 +7928,7 @@
               <a:t>br</a:t>
             </a:r>
             <a:r>
-              <a:rPr lang="en-US" b="0" i="0" dirty="0">
+              <a:rPr lang="en-US" sz="1200" b="0" i="0" dirty="0">
                 <a:solidFill>
                   <a:srgbClr val="212529"/>
                 </a:solidFill>
@@ -7898,16 +7940,13 @@
           </a:p>
           <a:p>
             <a:pPr algn="l">
-              <a:spcBef>
-                <a:spcPts val="1125"/>
-              </a:spcBef>
-              <a:spcAft>
-                <a:spcPts val="375"/>
-              </a:spcAft>
-              <a:buNone/>
-            </a:pPr>
-            <a:r>
-              <a:rPr lang="en-US" b="0" i="0" dirty="0">
+              <a:spcAft>
+                <a:spcPts val="375"/>
+              </a:spcAft>
+              <a:buNone/>
+            </a:pPr>
+            <a:r>
+              <a:rPr lang="en-US" sz="1200" b="0" i="0" dirty="0">
                 <a:solidFill>
                   <a:srgbClr val="212529"/>
                 </a:solidFill>
@@ -7917,7 +7956,7 @@
               <a:t>let </a:t>
             </a:r>
             <a:r>
-              <a:rPr lang="en-US" b="0" i="0" dirty="0" err="1">
+              <a:rPr lang="en-US" sz="1200" b="0" i="0" dirty="0" err="1">
                 <a:solidFill>
                   <a:srgbClr val="212529"/>
                 </a:solidFill>
@@ -7927,7 +7966,7 @@
               <a:t>bigNumber</a:t>
             </a:r>
             <a:r>
-              <a:rPr lang="en-US" b="0" i="0" dirty="0">
+              <a:rPr lang="en-US" sz="1200" b="0" i="0" dirty="0">
                 <a:solidFill>
                   <a:srgbClr val="212529"/>
                 </a:solidFill>
@@ -7937,7 +7976,7 @@
               <a:t> = 8938123748264892374749279272187847874899n;&lt;</a:t>
             </a:r>
             <a:r>
-              <a:rPr lang="en-US" b="0" i="0" dirty="0" err="1">
+              <a:rPr lang="en-US" sz="1200" b="0" i="0" dirty="0" err="1">
                 <a:solidFill>
                   <a:srgbClr val="212529"/>
                 </a:solidFill>
@@ -7947,7 +7986,7 @@
               <a:t>br</a:t>
             </a:r>
             <a:r>
-              <a:rPr lang="en-US" b="0" i="0" dirty="0">
+              <a:rPr lang="en-US" sz="1200" b="0" i="0" dirty="0">
                 <a:solidFill>
                   <a:srgbClr val="212529"/>
                 </a:solidFill>
@@ -7959,12 +7998,6 @@
           </a:p>
           <a:p>
             <a:pPr algn="just">
-              <a:lnSpc>
-                <a:spcPts val="2100"/>
-              </a:lnSpc>
-              <a:spcBef>
-                <a:spcPts val="1650"/>
-              </a:spcBef>
               <a:spcAft>
                 <a:spcPts val="600"/>
               </a:spcAft>
@@ -7972,7 +8005,7 @@
               <a:buAutoNum type="arabicPeriod" startAt="3"/>
             </a:pPr>
             <a:r>
-              <a:rPr lang="en-US" b="0" i="0" dirty="0">
+              <a:rPr lang="en-US" sz="1200" b="0" i="0" dirty="0">
                 <a:solidFill>
                   <a:srgbClr val="3A3A3A"/>
                 </a:solidFill>
@@ -7984,16 +8017,13 @@
           </a:p>
           <a:p>
             <a:pPr algn="l">
-              <a:spcBef>
-                <a:spcPts val="1125"/>
-              </a:spcBef>
-              <a:spcAft>
-                <a:spcPts val="375"/>
-              </a:spcAft>
-              <a:buNone/>
-            </a:pPr>
-            <a:r>
-              <a:rPr lang="en-US" b="0" i="0" dirty="0">
+              <a:spcAft>
+                <a:spcPts val="375"/>
+              </a:spcAft>
+              <a:buNone/>
+            </a:pPr>
+            <a:r>
+              <a:rPr lang="en-US" sz="1200" b="0" i="0" dirty="0">
                 <a:solidFill>
                   <a:srgbClr val="212529"/>
                 </a:solidFill>
@@ -8003,7 +8033,7 @@
               <a:t>&lt;</a:t>
             </a:r>
             <a:r>
-              <a:rPr lang="en-US" b="0" i="0" dirty="0" err="1">
+              <a:rPr lang="en-US" sz="1200" b="0" i="0" dirty="0" err="1">
                 <a:solidFill>
                   <a:srgbClr val="212529"/>
                 </a:solidFill>
@@ -8013,7 +8043,7 @@
               <a:t>br</a:t>
             </a:r>
             <a:r>
-              <a:rPr lang="en-US" b="0" i="0" dirty="0">
+              <a:rPr lang="en-US" sz="1200" b="0" i="0" dirty="0">
                 <a:solidFill>
                   <a:srgbClr val="212529"/>
                 </a:solidFill>
@@ -8025,16 +8055,13 @@
           </a:p>
           <a:p>
             <a:pPr algn="l">
-              <a:spcBef>
-                <a:spcPts val="1125"/>
-              </a:spcBef>
-              <a:spcAft>
-                <a:spcPts val="375"/>
-              </a:spcAft>
-              <a:buNone/>
-            </a:pPr>
-            <a:r>
-              <a:rPr lang="en-US" b="0" i="0" dirty="0">
+              <a:spcAft>
+                <a:spcPts val="375"/>
+              </a:spcAft>
+              <a:buNone/>
+            </a:pPr>
+            <a:r>
+              <a:rPr lang="en-US" sz="1200" b="0" i="0" dirty="0">
                 <a:solidFill>
                   <a:srgbClr val="212529"/>
                 </a:solidFill>
@@ -8044,7 +8071,7 @@
               <a:t>let company = “</a:t>
             </a:r>
             <a:r>
-              <a:rPr lang="en-US" b="0" i="0" dirty="0" err="1">
+              <a:rPr lang="en-US" sz="1200" b="0" i="0" dirty="0" err="1">
                 <a:solidFill>
                   <a:srgbClr val="212529"/>
                 </a:solidFill>
@@ -8054,7 +8081,7 @@
               <a:t>Intellipaat</a:t>
             </a:r>
             <a:r>
-              <a:rPr lang="en-US" b="0" i="0" dirty="0">
+              <a:rPr lang="en-US" sz="1200" b="0" i="0" dirty="0">
                 <a:solidFill>
                   <a:srgbClr val="212529"/>
                 </a:solidFill>
@@ -8064,7 +8091,7 @@
               <a:t>”;&lt;</a:t>
             </a:r>
             <a:r>
-              <a:rPr lang="en-US" b="0" i="0" dirty="0" err="1">
+              <a:rPr lang="en-US" sz="1200" b="0" i="0" dirty="0" err="1">
                 <a:solidFill>
                   <a:srgbClr val="212529"/>
                 </a:solidFill>
@@ -8074,7 +8101,7 @@
               <a:t>br</a:t>
             </a:r>
             <a:r>
-              <a:rPr lang="en-US" b="0" i="0" dirty="0">
+              <a:rPr lang="en-US" sz="1200" b="0" i="0" dirty="0">
                 <a:solidFill>
                   <a:srgbClr val="212529"/>
                 </a:solidFill>
@@ -8100,8 +8127,8 @@
         </p:nvSpPr>
         <p:spPr>
           <a:xfrm>
-            <a:off x="4756244" y="-1867322"/>
-            <a:ext cx="5076966" cy="10592643"/>
+            <a:off x="688157" y="2428944"/>
+            <a:ext cx="9217843" cy="3944670"/>
           </a:xfrm>
           <a:prstGeom prst="rect">
             <a:avLst/>
@@ -8115,12 +8142,6 @@
           <a:lstStyle/>
           <a:p>
             <a:pPr algn="just">
-              <a:lnSpc>
-                <a:spcPts val="2100"/>
-              </a:lnSpc>
-              <a:spcBef>
-                <a:spcPts val="1650"/>
-              </a:spcBef>
               <a:spcAft>
                 <a:spcPts val="600"/>
               </a:spcAft>
@@ -8128,7 +8149,7 @@
               <a:buAutoNum type="arabicPeriod" startAt="4"/>
             </a:pPr>
             <a:r>
-              <a:rPr lang="en-US" b="0" i="0" dirty="0">
+              <a:rPr lang="en-US" sz="1200" b="0" i="0" dirty="0">
                 <a:solidFill>
                   <a:srgbClr val="3A3A3A"/>
                 </a:solidFill>
@@ -8140,16 +8161,13 @@
           </a:p>
           <a:p>
             <a:pPr algn="l">
-              <a:spcBef>
-                <a:spcPts val="1125"/>
-              </a:spcBef>
-              <a:spcAft>
-                <a:spcPts val="375"/>
-              </a:spcAft>
-              <a:buNone/>
-            </a:pPr>
-            <a:r>
-              <a:rPr lang="en-US" b="0" i="0" dirty="0">
+              <a:spcAft>
+                <a:spcPts val="375"/>
+              </a:spcAft>
+              <a:buNone/>
+            </a:pPr>
+            <a:r>
+              <a:rPr lang="en-US" sz="1200" b="0" i="0" dirty="0">
                 <a:solidFill>
                   <a:srgbClr val="212529"/>
                 </a:solidFill>
@@ -8159,7 +8177,7 @@
               <a:t>&lt;</a:t>
             </a:r>
             <a:r>
-              <a:rPr lang="en-US" b="0" i="0" dirty="0" err="1">
+              <a:rPr lang="en-US" sz="1200" b="0" i="0" dirty="0" err="1">
                 <a:solidFill>
                   <a:srgbClr val="212529"/>
                 </a:solidFill>
@@ -8169,7 +8187,7 @@
               <a:t>br</a:t>
             </a:r>
             <a:r>
-              <a:rPr lang="en-US" b="0" i="0" dirty="0">
+              <a:rPr lang="en-US" sz="1200" b="0" i="0" dirty="0">
                 <a:solidFill>
                   <a:srgbClr val="212529"/>
                 </a:solidFill>
@@ -8181,16 +8199,13 @@
           </a:p>
           <a:p>
             <a:pPr algn="l">
-              <a:spcBef>
-                <a:spcPts val="1125"/>
-              </a:spcBef>
-              <a:spcAft>
-                <a:spcPts val="375"/>
-              </a:spcAft>
-              <a:buNone/>
-            </a:pPr>
-            <a:r>
-              <a:rPr lang="en-US" b="0" i="0" dirty="0">
+              <a:spcAft>
+                <a:spcPts val="375"/>
+              </a:spcAft>
+              <a:buNone/>
+            </a:pPr>
+            <a:r>
+              <a:rPr lang="en-US" sz="1200" b="0" i="0" dirty="0">
                 <a:solidFill>
                   <a:srgbClr val="212529"/>
                 </a:solidFill>
@@ -8200,7 +8215,7 @@
               <a:t>let </a:t>
             </a:r>
             <a:r>
-              <a:rPr lang="en-US" b="0" i="0" dirty="0" err="1">
+              <a:rPr lang="en-US" sz="1200" b="0" i="0" dirty="0" err="1">
                 <a:solidFill>
                   <a:srgbClr val="212529"/>
                 </a:solidFill>
@@ -8210,7 +8225,7 @@
               <a:t>boolValue</a:t>
             </a:r>
             <a:r>
-              <a:rPr lang="en-US" b="0" i="0" dirty="0">
+              <a:rPr lang="en-US" sz="1200" b="0" i="0" dirty="0">
                 <a:solidFill>
                   <a:srgbClr val="212529"/>
                 </a:solidFill>
@@ -8220,7 +8235,7 @@
               <a:t> = false;&lt;</a:t>
             </a:r>
             <a:r>
-              <a:rPr lang="en-US" b="0" i="0" dirty="0" err="1">
+              <a:rPr lang="en-US" sz="1200" b="0" i="0" dirty="0" err="1">
                 <a:solidFill>
                   <a:srgbClr val="212529"/>
                 </a:solidFill>
@@ -8230,7 +8245,7 @@
               <a:t>br</a:t>
             </a:r>
             <a:r>
-              <a:rPr lang="en-US" b="0" i="0" dirty="0">
+              <a:rPr lang="en-US" sz="1200" b="0" i="0" dirty="0">
                 <a:solidFill>
                   <a:srgbClr val="212529"/>
                 </a:solidFill>
@@ -8242,12 +8257,6 @@
           </a:p>
           <a:p>
             <a:pPr algn="just">
-              <a:lnSpc>
-                <a:spcPts val="2100"/>
-              </a:lnSpc>
-              <a:spcBef>
-                <a:spcPts val="1650"/>
-              </a:spcBef>
               <a:spcAft>
                 <a:spcPts val="600"/>
               </a:spcAft>
@@ -8255,7 +8264,7 @@
               <a:buAutoNum type="arabicPeriod" startAt="5"/>
             </a:pPr>
             <a:r>
-              <a:rPr lang="en-US" b="0" i="0" dirty="0">
+              <a:rPr lang="en-US" sz="1200" b="0" i="0" dirty="0">
                 <a:solidFill>
                   <a:srgbClr val="3A3A3A"/>
                 </a:solidFill>
@@ -8267,16 +8276,13 @@
           </a:p>
           <a:p>
             <a:pPr algn="l">
-              <a:spcBef>
-                <a:spcPts val="1125"/>
-              </a:spcBef>
-              <a:spcAft>
-                <a:spcPts val="375"/>
-              </a:spcAft>
-              <a:buNone/>
-            </a:pPr>
-            <a:r>
-              <a:rPr lang="en-US" b="0" i="0" dirty="0">
+              <a:spcAft>
+                <a:spcPts val="375"/>
+              </a:spcAft>
+              <a:buNone/>
+            </a:pPr>
+            <a:r>
+              <a:rPr lang="en-US" sz="1200" b="0" i="0" dirty="0">
                 <a:solidFill>
                   <a:srgbClr val="212529"/>
                 </a:solidFill>
@@ -8286,7 +8292,7 @@
               <a:t>&lt;</a:t>
             </a:r>
             <a:r>
-              <a:rPr lang="en-US" b="0" i="0" dirty="0" err="1">
+              <a:rPr lang="en-US" sz="1200" b="0" i="0" dirty="0" err="1">
                 <a:solidFill>
                   <a:srgbClr val="212529"/>
                 </a:solidFill>
@@ -8296,7 +8302,7 @@
               <a:t>br</a:t>
             </a:r>
             <a:r>
-              <a:rPr lang="en-US" b="0" i="0" dirty="0">
+              <a:rPr lang="en-US" sz="1200" b="0" i="0" dirty="0">
                 <a:solidFill>
                   <a:srgbClr val="212529"/>
                 </a:solidFill>
@@ -8308,16 +8314,13 @@
           </a:p>
           <a:p>
             <a:pPr algn="l">
-              <a:spcBef>
-                <a:spcPts val="1125"/>
-              </a:spcBef>
-              <a:spcAft>
-                <a:spcPts val="375"/>
-              </a:spcAft>
-              <a:buNone/>
-            </a:pPr>
-            <a:r>
-              <a:rPr lang="en-US" b="0" i="0" dirty="0">
+              <a:spcAft>
+                <a:spcPts val="375"/>
+              </a:spcAft>
+              <a:buNone/>
+            </a:pPr>
+            <a:r>
+              <a:rPr lang="en-US" sz="1200" b="0" i="0" dirty="0">
                 <a:solidFill>
                   <a:srgbClr val="212529"/>
                 </a:solidFill>
@@ -8327,7 +8330,7 @@
               <a:t>let </a:t>
             </a:r>
             <a:r>
-              <a:rPr lang="en-US" b="0" i="0" dirty="0" err="1">
+              <a:rPr lang="en-US" sz="1200" b="0" i="0" dirty="0" err="1">
                 <a:solidFill>
                   <a:srgbClr val="212529"/>
                 </a:solidFill>
@@ -8337,7 +8340,7 @@
               <a:t>myValue</a:t>
             </a:r>
             <a:r>
-              <a:rPr lang="en-US" b="0" i="0" dirty="0">
+              <a:rPr lang="en-US" sz="1200" b="0" i="0" dirty="0">
                 <a:solidFill>
                   <a:srgbClr val="212529"/>
                 </a:solidFill>
@@ -8347,7 +8350,7 @@
               <a:t>;&lt;</a:t>
             </a:r>
             <a:r>
-              <a:rPr lang="en-US" b="0" i="0" dirty="0" err="1">
+              <a:rPr lang="en-US" sz="1200" b="0" i="0" dirty="0" err="1">
                 <a:solidFill>
                   <a:srgbClr val="212529"/>
                 </a:solidFill>
@@ -8357,7 +8360,7 @@
               <a:t>br</a:t>
             </a:r>
             <a:r>
-              <a:rPr lang="en-US" b="0" i="0" dirty="0">
+              <a:rPr lang="en-US" sz="1200" b="0" i="0" dirty="0">
                 <a:solidFill>
                   <a:srgbClr val="212529"/>
                 </a:solidFill>
@@ -8369,12 +8372,6 @@
           </a:p>
           <a:p>
             <a:pPr algn="just">
-              <a:lnSpc>
-                <a:spcPts val="2100"/>
-              </a:lnSpc>
-              <a:spcBef>
-                <a:spcPts val="1650"/>
-              </a:spcBef>
               <a:spcAft>
                 <a:spcPts val="600"/>
               </a:spcAft>
@@ -8382,7 +8379,7 @@
               <a:buAutoNum type="arabicPeriod" startAt="6"/>
             </a:pPr>
             <a:r>
-              <a:rPr lang="en-US" b="0" i="0" dirty="0">
+              <a:rPr lang="en-US" sz="1200" b="0" i="0" dirty="0">
                 <a:solidFill>
                   <a:srgbClr val="3A3A3A"/>
                 </a:solidFill>
@@ -8394,16 +8391,13 @@
           </a:p>
           <a:p>
             <a:pPr algn="l">
-              <a:spcBef>
-                <a:spcPts val="1125"/>
-              </a:spcBef>
-              <a:spcAft>
-                <a:spcPts val="375"/>
-              </a:spcAft>
-              <a:buNone/>
-            </a:pPr>
-            <a:r>
-              <a:rPr lang="en-US" b="0" i="0" dirty="0">
+              <a:spcAft>
+                <a:spcPts val="375"/>
+              </a:spcAft>
+              <a:buNone/>
+            </a:pPr>
+            <a:r>
+              <a:rPr lang="en-US" sz="1200" b="0" i="0" dirty="0">
                 <a:solidFill>
                   <a:srgbClr val="212529"/>
                 </a:solidFill>
@@ -8413,7 +8407,7 @@
               <a:t>&lt;</a:t>
             </a:r>
             <a:r>
-              <a:rPr lang="en-US" b="0" i="0" dirty="0" err="1">
+              <a:rPr lang="en-US" sz="1200" b="0" i="0" dirty="0" err="1">
                 <a:solidFill>
                   <a:srgbClr val="212529"/>
                 </a:solidFill>
@@ -8423,7 +8417,7 @@
               <a:t>br</a:t>
             </a:r>
             <a:r>
-              <a:rPr lang="en-US" b="0" i="0" dirty="0">
+              <a:rPr lang="en-US" sz="1200" b="0" i="0" dirty="0">
                 <a:solidFill>
                   <a:srgbClr val="212529"/>
                 </a:solidFill>
@@ -8435,16 +8429,13 @@
           </a:p>
           <a:p>
             <a:pPr algn="l">
-              <a:spcBef>
-                <a:spcPts val="1125"/>
-              </a:spcBef>
-              <a:spcAft>
-                <a:spcPts val="375"/>
-              </a:spcAft>
-              <a:buNone/>
-            </a:pPr>
-            <a:r>
-              <a:rPr lang="en-US" b="0" i="0" dirty="0">
+              <a:spcAft>
+                <a:spcPts val="375"/>
+              </a:spcAft>
+              <a:buNone/>
+            </a:pPr>
+            <a:r>
+              <a:rPr lang="en-US" sz="1200" b="0" i="0" dirty="0">
                 <a:solidFill>
                   <a:srgbClr val="212529"/>
                 </a:solidFill>
@@ -8454,7 +8445,7 @@
               <a:t>let </a:t>
             </a:r>
             <a:r>
-              <a:rPr lang="en-US" b="0" i="0" dirty="0" err="1">
+              <a:rPr lang="en-US" sz="1200" b="0" i="0" dirty="0" err="1">
                 <a:solidFill>
                   <a:srgbClr val="212529"/>
                 </a:solidFill>
@@ -8464,7 +8455,7 @@
               <a:t>noValue</a:t>
             </a:r>
             <a:r>
-              <a:rPr lang="en-US" b="0" i="0" dirty="0">
+              <a:rPr lang="en-US" sz="1200" b="0" i="0" dirty="0">
                 <a:solidFill>
                   <a:srgbClr val="212529"/>
                 </a:solidFill>
@@ -8474,7 +8465,7 @@
               <a:t> = null;&lt;</a:t>
             </a:r>
             <a:r>
-              <a:rPr lang="en-US" b="0" i="0" dirty="0" err="1">
+              <a:rPr lang="en-US" sz="1200" b="0" i="0" dirty="0" err="1">
                 <a:solidFill>
                   <a:srgbClr val="212529"/>
                 </a:solidFill>
@@ -8484,7 +8475,7 @@
               <a:t>br</a:t>
             </a:r>
             <a:r>
-              <a:rPr lang="en-US" b="0" i="0" dirty="0">
+              <a:rPr lang="en-US" sz="1200" b="0" i="0" dirty="0">
                 <a:solidFill>
                   <a:srgbClr val="212529"/>
                 </a:solidFill>
@@ -8496,12 +8487,6 @@
           </a:p>
           <a:p>
             <a:pPr algn="just">
-              <a:lnSpc>
-                <a:spcPts val="2100"/>
-              </a:lnSpc>
-              <a:spcBef>
-                <a:spcPts val="1650"/>
-              </a:spcBef>
               <a:spcAft>
                 <a:spcPts val="600"/>
               </a:spcAft>
@@ -8509,7 +8494,7 @@
               <a:buAutoNum type="arabicPeriod" startAt="7"/>
             </a:pPr>
             <a:r>
-              <a:rPr lang="en-US" b="0" i="0" dirty="0">
+              <a:rPr lang="en-US" sz="1200" b="0" i="0" dirty="0">
                 <a:solidFill>
                   <a:srgbClr val="3A3A3A"/>
                 </a:solidFill>
@@ -8521,16 +8506,13 @@
           </a:p>
           <a:p>
             <a:pPr algn="l">
-              <a:spcBef>
-                <a:spcPts val="1125"/>
-              </a:spcBef>
-              <a:spcAft>
-                <a:spcPts val="375"/>
-              </a:spcAft>
-              <a:buNone/>
-            </a:pPr>
-            <a:r>
-              <a:rPr lang="en-US" b="0" i="0" dirty="0">
+              <a:spcAft>
+                <a:spcPts val="375"/>
+              </a:spcAft>
+              <a:buNone/>
+            </a:pPr>
+            <a:r>
+              <a:rPr lang="en-US" sz="1200" b="0" i="0" dirty="0">
                 <a:solidFill>
                   <a:srgbClr val="212529"/>
                 </a:solidFill>
@@ -8540,7 +8522,7 @@
               <a:t>&lt;</a:t>
             </a:r>
             <a:r>
-              <a:rPr lang="en-US" b="0" i="0" dirty="0" err="1">
+              <a:rPr lang="en-US" sz="1200" b="0" i="0" dirty="0" err="1">
                 <a:solidFill>
                   <a:srgbClr val="212529"/>
                 </a:solidFill>
@@ -8550,7 +8532,7 @@
               <a:t>br</a:t>
             </a:r>
             <a:r>
-              <a:rPr lang="en-US" b="0" i="0" dirty="0">
+              <a:rPr lang="en-US" sz="1200" b="0" i="0" dirty="0">
                 <a:solidFill>
                   <a:srgbClr val="212529"/>
                 </a:solidFill>
@@ -8562,16 +8544,13 @@
           </a:p>
           <a:p>
             <a:pPr algn="l">
-              <a:spcBef>
-                <a:spcPts val="1125"/>
-              </a:spcBef>
-              <a:spcAft>
-                <a:spcPts val="375"/>
-              </a:spcAft>
-              <a:buNone/>
-            </a:pPr>
-            <a:r>
-              <a:rPr lang="en-US" b="0" i="0" dirty="0">
+              <a:spcAft>
+                <a:spcPts val="375"/>
+              </a:spcAft>
+              <a:buNone/>
+            </a:pPr>
+            <a:r>
+              <a:rPr lang="en-US" sz="1200" b="0" i="0" dirty="0">
                 <a:solidFill>
                   <a:srgbClr val="212529"/>
                 </a:solidFill>
@@ -8581,7 +8560,7 @@
               <a:t>let </a:t>
             </a:r>
             <a:r>
-              <a:rPr lang="en-US" b="0" i="0" dirty="0" err="1">
+              <a:rPr lang="en-US" sz="1200" b="0" i="0" dirty="0" err="1">
                 <a:solidFill>
                   <a:srgbClr val="212529"/>
                 </a:solidFill>
@@ -8591,7 +8570,7 @@
               <a:t>uniqueValue</a:t>
             </a:r>
             <a:r>
-              <a:rPr lang="en-US" b="0" i="0" dirty="0">
+              <a:rPr lang="en-US" sz="1200" b="0" i="0" dirty="0">
                 <a:solidFill>
                   <a:srgbClr val="212529"/>
                 </a:solidFill>
@@ -8601,7 +8580,7 @@
               <a:t> = Symbol(“unique”);&lt;</a:t>
             </a:r>
             <a:r>
-              <a:rPr lang="en-US" b="0" i="0" dirty="0" err="1">
+              <a:rPr lang="en-US" sz="1200" b="0" i="0" dirty="0" err="1">
                 <a:solidFill>
                   <a:srgbClr val="212529"/>
                 </a:solidFill>
@@ -8611,7 +8590,7 @@
               <a:t>br</a:t>
             </a:r>
             <a:r>
-              <a:rPr lang="en-US" b="0" i="0" dirty="0">
+              <a:rPr lang="en-US" sz="1200" b="0" i="0" dirty="0">
                 <a:solidFill>
                   <a:srgbClr val="212529"/>
                 </a:solidFill>
@@ -8623,12 +8602,6 @@
           </a:p>
           <a:p>
             <a:pPr algn="just">
-              <a:lnSpc>
-                <a:spcPts val="2100"/>
-              </a:lnSpc>
-              <a:spcBef>
-                <a:spcPts val="1650"/>
-              </a:spcBef>
               <a:spcAft>
                 <a:spcPts val="600"/>
               </a:spcAft>
@@ -8636,7 +8609,7 @@
               <a:buAutoNum type="arabicPeriod" startAt="8"/>
             </a:pPr>
             <a:r>
-              <a:rPr lang="en-US" b="0" i="0" dirty="0">
+              <a:rPr lang="en-US" sz="1200" b="0" i="0" dirty="0">
                 <a:solidFill>
                   <a:srgbClr val="3A3A3A"/>
                 </a:solidFill>
@@ -8646,7 +8619,7 @@
               <a:t>Object – </a:t>
             </a:r>
             <a:r>
-              <a:rPr lang="en-US" b="0" i="0" u="none" strike="noStrike" dirty="0">
+              <a:rPr lang="en-US" sz="1200" b="0" i="0" u="none" strike="noStrike" dirty="0">
                 <a:solidFill>
                   <a:srgbClr val="0F5A9E"/>
                 </a:solidFill>
@@ -8657,7 +8630,7 @@
               <a:t>Objects in JavaScript</a:t>
             </a:r>
             <a:r>
-              <a:rPr lang="en-US" b="0" i="0" dirty="0">
+              <a:rPr lang="en-US" sz="1200" b="0" i="0" dirty="0">
                 <a:solidFill>
                   <a:srgbClr val="3A3A3A"/>
                 </a:solidFill>
@@ -8669,16 +8642,13 @@
           </a:p>
           <a:p>
             <a:pPr algn="l">
-              <a:spcBef>
-                <a:spcPts val="1125"/>
-              </a:spcBef>
-              <a:spcAft>
-                <a:spcPts val="375"/>
-              </a:spcAft>
-              <a:buNone/>
-            </a:pPr>
-            <a:r>
-              <a:rPr lang="en-US" b="0" i="0" dirty="0">
+              <a:spcAft>
+                <a:spcPts val="375"/>
+              </a:spcAft>
+              <a:buNone/>
+            </a:pPr>
+            <a:r>
+              <a:rPr lang="en-US" sz="1200" b="0" i="0" dirty="0">
                 <a:solidFill>
                   <a:srgbClr val="212529"/>
                 </a:solidFill>
@@ -8688,7 +8658,7 @@
               <a:t>&lt;</a:t>
             </a:r>
             <a:r>
-              <a:rPr lang="en-US" b="0" i="0" dirty="0" err="1">
+              <a:rPr lang="en-US" sz="1200" b="0" i="0" dirty="0" err="1">
                 <a:solidFill>
                   <a:srgbClr val="212529"/>
                 </a:solidFill>
@@ -8698,7 +8668,7 @@
               <a:t>br</a:t>
             </a:r>
             <a:r>
-              <a:rPr lang="en-US" b="0" i="0" dirty="0">
+              <a:rPr lang="en-US" sz="1200" b="0" i="0" dirty="0">
                 <a:solidFill>
                   <a:srgbClr val="212529"/>
                 </a:solidFill>
@@ -8710,16 +8680,13 @@
           </a:p>
           <a:p>
             <a:pPr algn="l">
-              <a:spcBef>
-                <a:spcPts val="1125"/>
-              </a:spcBef>
-              <a:spcAft>
-                <a:spcPts val="375"/>
-              </a:spcAft>
-              <a:buNone/>
-            </a:pPr>
-            <a:r>
-              <a:rPr lang="en-US" b="0" i="0" dirty="0">
+              <a:spcAft>
+                <a:spcPts val="375"/>
+              </a:spcAft>
+              <a:buNone/>
+            </a:pPr>
+            <a:r>
+              <a:rPr lang="en-US" sz="1200" b="0" i="0" dirty="0">
                 <a:solidFill>
                   <a:srgbClr val="212529"/>
                 </a:solidFill>
@@ -8729,7 +8696,7 @@
               <a:t>let company = { name: “</a:t>
             </a:r>
             <a:r>
-              <a:rPr lang="en-US" b="0" i="0" dirty="0" err="1">
+              <a:rPr lang="en-US" sz="1200" b="0" i="0" dirty="0" err="1">
                 <a:solidFill>
                   <a:srgbClr val="212529"/>
                 </a:solidFill>
@@ -8739,7 +8706,7 @@
               <a:t>Intellipaat</a:t>
             </a:r>
             <a:r>
-              <a:rPr lang="en-US" b="0" i="0" dirty="0">
+              <a:rPr lang="en-US" sz="1200" b="0" i="0" dirty="0">
                 <a:solidFill>
                   <a:srgbClr val="212529"/>
                 </a:solidFill>
@@ -8749,7 +8716,7 @@
               <a:t>”, employees: 200 };&lt;</a:t>
             </a:r>
             <a:r>
-              <a:rPr lang="en-US" b="0" i="0" dirty="0" err="1">
+              <a:rPr lang="en-US" sz="1200" b="0" i="0" dirty="0" err="1">
                 <a:solidFill>
                   <a:srgbClr val="212529"/>
                 </a:solidFill>
@@ -8759,7 +8726,7 @@
               <a:t>br</a:t>
             </a:r>
             <a:r>
-              <a:rPr lang="en-US" b="0" i="0" dirty="0">
+              <a:rPr lang="en-US" sz="1200" b="0" i="0" dirty="0">
                 <a:solidFill>
                   <a:srgbClr val="212529"/>
                 </a:solidFill>
@@ -8771,16 +8738,10 @@
           </a:p>
           <a:p>
             <a:pPr algn="just">
-              <a:lnSpc>
-                <a:spcPts val="2100"/>
-              </a:lnSpc>
-              <a:spcBef>
-                <a:spcPts val="1650"/>
-              </a:spcBef>
-              <a:buNone/>
-            </a:pPr>
-            <a:r>
-              <a:rPr lang="en-US" b="0" i="0" dirty="0">
+              <a:buNone/>
+            </a:pPr>
+            <a:r>
+              <a:rPr lang="en-US" sz="1200" b="0" i="0" dirty="0">
                 <a:solidFill>
                   <a:srgbClr val="3A3A3A"/>
                 </a:solidFill>
@@ -8790,7 +8751,7 @@
               <a:t>Understand what the </a:t>
             </a:r>
             <a:r>
-              <a:rPr lang="en-US" b="0" i="0" u="none" strike="noStrike" dirty="0">
+              <a:rPr lang="en-US" sz="1200" b="0" i="0" u="none" strike="noStrike" dirty="0">
                 <a:solidFill>
                   <a:srgbClr val="0F5A9E"/>
                 </a:solidFill>
@@ -8801,7 +8762,7 @@
               <a:t>highest integer value is in JavaScript</a:t>
             </a:r>
             <a:r>
-              <a:rPr lang="en-US" b="0" i="0" dirty="0">
+              <a:rPr lang="en-US" sz="1200" b="0" i="0" dirty="0">
                 <a:solidFill>
                   <a:srgbClr val="3A3A3A"/>
                 </a:solidFill>
